--- a/draft/ogp-syuusyuu-kari.pptx
+++ b/draft/ogp-syuusyuu-kari.pptx
@@ -6,6 +6,7 @@
   </p:sldMasterIdLst>
   <p:sldIdLst>
     <p:sldId id="256" r:id="rId2"/>
+    <p:sldId id="257" r:id="rId3"/>
   </p:sldIdLst>
   <p:sldSz cx="9144000" cy="4800600"/>
   <p:notesSz cx="6858000" cy="9144000"/>
@@ -104,6 +105,11 @@
       </a:defRPr>
     </a:lvl9pPr>
   </p:defaultTextStyle>
+  <p:extLst>
+    <p:ext uri="{EFAFB233-063F-42B5-8137-9DF3F51BA10A}">
+      <p15:sldGuideLst xmlns:p15="http://schemas.microsoft.com/office/powerpoint/2012/main"/>
+    </p:ext>
+  </p:extLst>
 </p:presentation>
 </file>
 
@@ -3393,6 +3399,210 @@
 </p:sld>
 </file>
 
+<file path=ppt/slides/slide2.xml><?xml version="1.0" encoding="utf-8"?>
+<p:sld xmlns:a="http://schemas.openxmlformats.org/drawingml/2006/main" xmlns:r="http://schemas.openxmlformats.org/officeDocument/2006/relationships" xmlns:p="http://schemas.openxmlformats.org/presentationml/2006/main">
+  <p:cSld>
+    <p:spTree>
+      <p:nvGrpSpPr>
+        <p:cNvPr id="1" name=""/>
+        <p:cNvGrpSpPr/>
+        <p:nvPr/>
+      </p:nvGrpSpPr>
+      <p:grpSpPr>
+        <a:xfrm>
+          <a:off x="0" y="0"/>
+          <a:ext cx="0" cy="0"/>
+          <a:chOff x="0" y="0"/>
+          <a:chExt cx="0" cy="0"/>
+        </a:xfrm>
+      </p:grpSpPr>
+      <p:pic>
+        <p:nvPicPr>
+          <p:cNvPr id="5" name="図 4">
+            <a:extLst>
+              <a:ext uri="{FF2B5EF4-FFF2-40B4-BE49-F238E27FC236}">
+                <a16:creationId xmlns:a16="http://schemas.microsoft.com/office/drawing/2014/main" id="{1CF2CF71-9530-BE41-2FCC-527E6ADC8910}"/>
+              </a:ext>
+            </a:extLst>
+          </p:cNvPr>
+          <p:cNvPicPr>
+            <a:picLocks noChangeAspect="1"/>
+          </p:cNvPicPr>
+          <p:nvPr/>
+        </p:nvPicPr>
+        <p:blipFill>
+          <a:blip r:embed="rId2">
+            <a:extLst>
+              <a:ext uri="{28A0092B-C50C-407E-A947-70E740481C1C}">
+                <a14:useLocalDpi xmlns:a14="http://schemas.microsoft.com/office/drawing/2010/main" val="0"/>
+              </a:ext>
+            </a:extLst>
+          </a:blip>
+          <a:stretch>
+            <a:fillRect/>
+          </a:stretch>
+        </p:blipFill>
+        <p:spPr>
+          <a:xfrm>
+            <a:off x="0" y="0"/>
+            <a:ext cx="9144000" cy="4800600"/>
+          </a:xfrm>
+          <a:prstGeom prst="rect">
+            <a:avLst/>
+          </a:prstGeom>
+        </p:spPr>
+      </p:pic>
+      <p:sp>
+        <p:nvSpPr>
+          <p:cNvPr id="6" name="テキスト ボックス 5">
+            <a:extLst>
+              <a:ext uri="{FF2B5EF4-FFF2-40B4-BE49-F238E27FC236}">
+                <a16:creationId xmlns:a16="http://schemas.microsoft.com/office/drawing/2014/main" id="{C3454899-04B3-C97E-0067-8ACA9615E57B}"/>
+              </a:ext>
+            </a:extLst>
+          </p:cNvPr>
+          <p:cNvSpPr txBox="1"/>
+          <p:nvPr/>
+        </p:nvSpPr>
+        <p:spPr>
+          <a:xfrm>
+            <a:off x="3293445" y="1757011"/>
+            <a:ext cx="2557110" cy="2225225"/>
+          </a:xfrm>
+          <a:prstGeom prst="rect">
+            <a:avLst/>
+          </a:prstGeom>
+          <a:noFill/>
+        </p:spPr>
+        <p:txBody>
+          <a:bodyPr wrap="none" rtlCol="0">
+            <a:spAutoFit/>
+          </a:bodyPr>
+          <a:lstStyle/>
+          <a:p>
+            <a:r>
+              <a:rPr lang="ja-JP" altLang="en-US" sz="4620" b="1">
+                <a:ln w="3175">
+                  <a:solidFill>
+                    <a:schemeClr val="tx1"/>
+                  </a:solidFill>
+                </a:ln>
+                <a:solidFill>
+                  <a:schemeClr val="bg1"/>
+                </a:solidFill>
+              </a:rPr>
+              <a:t>試験概要</a:t>
+            </a:r>
+            <a:endParaRPr lang="en-US" altLang="ja-JP" sz="4620" b="1">
+              <a:ln w="3175">
+                <a:solidFill>
+                  <a:schemeClr val="tx1"/>
+                </a:solidFill>
+              </a:ln>
+              <a:solidFill>
+                <a:schemeClr val="bg1"/>
+              </a:solidFill>
+            </a:endParaRPr>
+          </a:p>
+          <a:p>
+            <a:r>
+              <a:rPr lang="ja-JP" altLang="en-US" sz="4620" b="1">
+                <a:ln w="3175">
+                  <a:solidFill>
+                    <a:schemeClr val="tx1"/>
+                  </a:solidFill>
+                </a:ln>
+                <a:solidFill>
+                  <a:schemeClr val="bg1"/>
+                </a:solidFill>
+              </a:rPr>
+              <a:t>受験案内</a:t>
+            </a:r>
+            <a:endParaRPr lang="en-US" altLang="ja-JP" sz="4620" b="1">
+              <a:ln w="3175">
+                <a:solidFill>
+                  <a:schemeClr val="tx1"/>
+                </a:solidFill>
+              </a:ln>
+              <a:solidFill>
+                <a:schemeClr val="bg1"/>
+              </a:solidFill>
+            </a:endParaRPr>
+          </a:p>
+          <a:p>
+            <a:r>
+              <a:rPr lang="ja-JP" altLang="en-US" sz="4620" b="1">
+                <a:ln w="3175">
+                  <a:solidFill>
+                    <a:schemeClr val="tx1"/>
+                  </a:solidFill>
+                </a:ln>
+                <a:solidFill>
+                  <a:schemeClr val="bg1"/>
+                </a:solidFill>
+              </a:rPr>
+              <a:t>関連情報</a:t>
+            </a:r>
+          </a:p>
+        </p:txBody>
+      </p:sp>
+      <p:sp>
+        <p:nvSpPr>
+          <p:cNvPr id="7" name="テキスト ボックス 6">
+            <a:extLst>
+              <a:ext uri="{FF2B5EF4-FFF2-40B4-BE49-F238E27FC236}">
+                <a16:creationId xmlns:a16="http://schemas.microsoft.com/office/drawing/2014/main" id="{CB2474F9-ABF1-5004-AD97-69B2FFB245FC}"/>
+              </a:ext>
+            </a:extLst>
+          </p:cNvPr>
+          <p:cNvSpPr txBox="1"/>
+          <p:nvPr/>
+        </p:nvSpPr>
+        <p:spPr>
+          <a:xfrm>
+            <a:off x="2325231" y="895467"/>
+            <a:ext cx="4493538" cy="738664"/>
+          </a:xfrm>
+          <a:prstGeom prst="rect">
+            <a:avLst/>
+          </a:prstGeom>
+          <a:noFill/>
+        </p:spPr>
+        <p:txBody>
+          <a:bodyPr wrap="none" rtlCol="0">
+            <a:spAutoFit/>
+          </a:bodyPr>
+          <a:lstStyle/>
+          <a:p>
+            <a:r>
+              <a:rPr lang="ja-JP" altLang="en-US" sz="4200" b="1">
+                <a:ln w="3175">
+                  <a:solidFill>
+                    <a:schemeClr val="tx1"/>
+                  </a:solidFill>
+                </a:ln>
+                <a:solidFill>
+                  <a:schemeClr val="bg1"/>
+                </a:solidFill>
+              </a:rPr>
+              <a:t>技術士第一次試験</a:t>
+            </a:r>
+          </a:p>
+        </p:txBody>
+      </p:sp>
+    </p:spTree>
+    <p:extLst>
+      <p:ext uri="{BB962C8B-B14F-4D97-AF65-F5344CB8AC3E}">
+        <p14:creationId xmlns:p14="http://schemas.microsoft.com/office/powerpoint/2010/main" val="388153871"/>
+      </p:ext>
+    </p:extLst>
+  </p:cSld>
+  <p:clrMapOvr>
+    <a:masterClrMapping/>
+  </p:clrMapOvr>
+</p:sld>
+</file>
+
 <file path=ppt/theme/theme1.xml><?xml version="1.0" encoding="utf-8"?>
 <a:theme xmlns:a="http://schemas.openxmlformats.org/drawingml/2006/main" name="Office テーマ">
   <a:themeElements>

--- a/draft/ogp-syuusyuu-kari.pptx
+++ b/draft/ogp-syuusyuu-kari.pptx
@@ -7,6 +7,7 @@
   <p:sldIdLst>
     <p:sldId id="256" r:id="rId2"/>
     <p:sldId id="257" r:id="rId3"/>
+    <p:sldId id="259" r:id="rId4"/>
   </p:sldIdLst>
   <p:sldSz cx="9144000" cy="4800600"/>
   <p:notesSz cx="6858000" cy="9144000"/>
@@ -244,7 +245,7 @@
           <a:p>
             <a:fld id="{D2D5E31B-7EB5-4AA6-9821-A1B9A0D2ECEF}" type="datetimeFigureOut">
               <a:rPr kumimoji="1" lang="ja-JP" altLang="en-US" smtClean="0"/>
-              <a:t>2026/5/31</a:t>
+              <a:t>2026/6/8</a:t>
             </a:fld>
             <a:endParaRPr kumimoji="1" lang="ja-JP" altLang="en-US"/>
           </a:p>
@@ -446,7 +447,7 @@
           <a:p>
             <a:fld id="{D2D5E31B-7EB5-4AA6-9821-A1B9A0D2ECEF}" type="datetimeFigureOut">
               <a:rPr kumimoji="1" lang="ja-JP" altLang="en-US" smtClean="0"/>
-              <a:t>2026/5/31</a:t>
+              <a:t>2026/6/8</a:t>
             </a:fld>
             <a:endParaRPr kumimoji="1" lang="ja-JP" altLang="en-US"/>
           </a:p>
@@ -658,7 +659,7 @@
           <a:p>
             <a:fld id="{D2D5E31B-7EB5-4AA6-9821-A1B9A0D2ECEF}" type="datetimeFigureOut">
               <a:rPr kumimoji="1" lang="ja-JP" altLang="en-US" smtClean="0"/>
-              <a:t>2026/5/31</a:t>
+              <a:t>2026/6/8</a:t>
             </a:fld>
             <a:endParaRPr kumimoji="1" lang="ja-JP" altLang="en-US"/>
           </a:p>
@@ -860,7 +861,7 @@
           <a:p>
             <a:fld id="{D2D5E31B-7EB5-4AA6-9821-A1B9A0D2ECEF}" type="datetimeFigureOut">
               <a:rPr kumimoji="1" lang="ja-JP" altLang="en-US" smtClean="0"/>
-              <a:t>2026/5/31</a:t>
+              <a:t>2026/6/8</a:t>
             </a:fld>
             <a:endParaRPr kumimoji="1" lang="ja-JP" altLang="en-US"/>
           </a:p>
@@ -1106,7 +1107,7 @@
           <a:p>
             <a:fld id="{D2D5E31B-7EB5-4AA6-9821-A1B9A0D2ECEF}" type="datetimeFigureOut">
               <a:rPr kumimoji="1" lang="ja-JP" altLang="en-US" smtClean="0"/>
-              <a:t>2026/5/31</a:t>
+              <a:t>2026/6/8</a:t>
             </a:fld>
             <a:endParaRPr kumimoji="1" lang="ja-JP" altLang="en-US"/>
           </a:p>
@@ -1402,7 +1403,7 @@
           <a:p>
             <a:fld id="{D2D5E31B-7EB5-4AA6-9821-A1B9A0D2ECEF}" type="datetimeFigureOut">
               <a:rPr kumimoji="1" lang="ja-JP" altLang="en-US" smtClean="0"/>
-              <a:t>2026/5/31</a:t>
+              <a:t>2026/6/8</a:t>
             </a:fld>
             <a:endParaRPr kumimoji="1" lang="ja-JP" altLang="en-US"/>
           </a:p>
@@ -1833,7 +1834,7 @@
           <a:p>
             <a:fld id="{D2D5E31B-7EB5-4AA6-9821-A1B9A0D2ECEF}" type="datetimeFigureOut">
               <a:rPr kumimoji="1" lang="ja-JP" altLang="en-US" smtClean="0"/>
-              <a:t>2026/5/31</a:t>
+              <a:t>2026/6/8</a:t>
             </a:fld>
             <a:endParaRPr kumimoji="1" lang="ja-JP" altLang="en-US"/>
           </a:p>
@@ -1951,7 +1952,7 @@
           <a:p>
             <a:fld id="{D2D5E31B-7EB5-4AA6-9821-A1B9A0D2ECEF}" type="datetimeFigureOut">
               <a:rPr kumimoji="1" lang="ja-JP" altLang="en-US" smtClean="0"/>
-              <a:t>2026/5/31</a:t>
+              <a:t>2026/6/8</a:t>
             </a:fld>
             <a:endParaRPr kumimoji="1" lang="ja-JP" altLang="en-US"/>
           </a:p>
@@ -2046,7 +2047,7 @@
           <a:p>
             <a:fld id="{D2D5E31B-7EB5-4AA6-9821-A1B9A0D2ECEF}" type="datetimeFigureOut">
               <a:rPr kumimoji="1" lang="ja-JP" altLang="en-US" smtClean="0"/>
-              <a:t>2026/5/31</a:t>
+              <a:t>2026/6/8</a:t>
             </a:fld>
             <a:endParaRPr kumimoji="1" lang="ja-JP" altLang="en-US"/>
           </a:p>
@@ -2355,7 +2356,7 @@
           <a:p>
             <a:fld id="{D2D5E31B-7EB5-4AA6-9821-A1B9A0D2ECEF}" type="datetimeFigureOut">
               <a:rPr kumimoji="1" lang="ja-JP" altLang="en-US" smtClean="0"/>
-              <a:t>2026/5/31</a:t>
+              <a:t>2026/6/8</a:t>
             </a:fld>
             <a:endParaRPr kumimoji="1" lang="ja-JP" altLang="en-US"/>
           </a:p>
@@ -2612,7 +2613,7 @@
           <a:p>
             <a:fld id="{D2D5E31B-7EB5-4AA6-9821-A1B9A0D2ECEF}" type="datetimeFigureOut">
               <a:rPr kumimoji="1" lang="ja-JP" altLang="en-US" smtClean="0"/>
-              <a:t>2026/5/31</a:t>
+              <a:t>2026/6/8</a:t>
             </a:fld>
             <a:endParaRPr kumimoji="1" lang="ja-JP" altLang="en-US"/>
           </a:p>
@@ -2857,7 +2858,7 @@
           <a:p>
             <a:fld id="{D2D5E31B-7EB5-4AA6-9821-A1B9A0D2ECEF}" type="datetimeFigureOut">
               <a:rPr kumimoji="1" lang="ja-JP" altLang="en-US" smtClean="0"/>
-              <a:t>2026/5/31</a:t>
+              <a:t>2026/6/8</a:t>
             </a:fld>
             <a:endParaRPr kumimoji="1" lang="ja-JP" altLang="en-US"/>
           </a:p>
@@ -3312,8 +3313,8 @@
         </p:nvSpPr>
         <p:spPr>
           <a:xfrm>
-            <a:off x="1098342" y="1757011"/>
-            <a:ext cx="7895110" cy="803297"/>
+            <a:off x="1514111" y="1985705"/>
+            <a:ext cx="6115777" cy="803297"/>
           </a:xfrm>
           <a:prstGeom prst="rect">
             <a:avLst/>
@@ -3337,7 +3338,7 @@
                   <a:schemeClr val="bg1"/>
                 </a:solidFill>
               </a:rPr>
-              <a:t>修習技術者支援委員会（仮）</a:t>
+              <a:t>修習技術者支援委員会</a:t>
             </a:r>
           </a:p>
         </p:txBody>
@@ -3356,7 +3357,7 @@
         </p:nvSpPr>
         <p:spPr>
           <a:xfrm>
-            <a:off x="3285376" y="895467"/>
+            <a:off x="3402448" y="999229"/>
             <a:ext cx="2339102" cy="738664"/>
           </a:xfrm>
           <a:prstGeom prst="rect">
@@ -3594,6 +3595,160 @@
     <p:extLst>
       <p:ext uri="{BB962C8B-B14F-4D97-AF65-F5344CB8AC3E}">
         <p14:creationId xmlns:p14="http://schemas.microsoft.com/office/powerpoint/2010/main" val="388153871"/>
+      </p:ext>
+    </p:extLst>
+  </p:cSld>
+  <p:clrMapOvr>
+    <a:masterClrMapping/>
+  </p:clrMapOvr>
+</p:sld>
+</file>
+
+<file path=ppt/slides/slide3.xml><?xml version="1.0" encoding="utf-8"?>
+<p:sld xmlns:a="http://schemas.openxmlformats.org/drawingml/2006/main" xmlns:r="http://schemas.openxmlformats.org/officeDocument/2006/relationships" xmlns:p="http://schemas.openxmlformats.org/presentationml/2006/main">
+  <p:cSld>
+    <p:spTree>
+      <p:nvGrpSpPr>
+        <p:cNvPr id="1" name=""/>
+        <p:cNvGrpSpPr/>
+        <p:nvPr/>
+      </p:nvGrpSpPr>
+      <p:grpSpPr>
+        <a:xfrm>
+          <a:off x="0" y="0"/>
+          <a:ext cx="0" cy="0"/>
+          <a:chOff x="0" y="0"/>
+          <a:chExt cx="0" cy="0"/>
+        </a:xfrm>
+      </p:grpSpPr>
+      <p:pic>
+        <p:nvPicPr>
+          <p:cNvPr id="5" name="図 4">
+            <a:extLst>
+              <a:ext uri="{FF2B5EF4-FFF2-40B4-BE49-F238E27FC236}">
+                <a16:creationId xmlns:a16="http://schemas.microsoft.com/office/drawing/2014/main" id="{1CF2CF71-9530-BE41-2FCC-527E6ADC8910}"/>
+              </a:ext>
+            </a:extLst>
+          </p:cNvPr>
+          <p:cNvPicPr>
+            <a:picLocks noChangeAspect="1"/>
+          </p:cNvPicPr>
+          <p:nvPr/>
+        </p:nvPicPr>
+        <p:blipFill>
+          <a:blip r:embed="rId2">
+            <a:extLst>
+              <a:ext uri="{28A0092B-C50C-407E-A947-70E740481C1C}">
+                <a14:useLocalDpi xmlns:a14="http://schemas.microsoft.com/office/drawing/2010/main" val="0"/>
+              </a:ext>
+            </a:extLst>
+          </a:blip>
+          <a:stretch>
+            <a:fillRect/>
+          </a:stretch>
+        </p:blipFill>
+        <p:spPr>
+          <a:xfrm>
+            <a:off x="0" y="0"/>
+            <a:ext cx="9144000" cy="4800600"/>
+          </a:xfrm>
+          <a:prstGeom prst="rect">
+            <a:avLst/>
+          </a:prstGeom>
+        </p:spPr>
+      </p:pic>
+      <p:sp>
+        <p:nvSpPr>
+          <p:cNvPr id="2" name="テキスト ボックス 1">
+            <a:extLst>
+              <a:ext uri="{FF2B5EF4-FFF2-40B4-BE49-F238E27FC236}">
+                <a16:creationId xmlns:a16="http://schemas.microsoft.com/office/drawing/2014/main" id="{4B08D6FB-0568-07F6-1BA8-17F24EE35897}"/>
+              </a:ext>
+            </a:extLst>
+          </p:cNvPr>
+          <p:cNvSpPr txBox="1"/>
+          <p:nvPr/>
+        </p:nvSpPr>
+        <p:spPr>
+          <a:xfrm>
+            <a:off x="1283167" y="1436995"/>
+            <a:ext cx="6115777" cy="803297"/>
+          </a:xfrm>
+          <a:prstGeom prst="rect">
+            <a:avLst/>
+          </a:prstGeom>
+          <a:noFill/>
+        </p:spPr>
+        <p:txBody>
+          <a:bodyPr wrap="none" rtlCol="0">
+            <a:spAutoFit/>
+          </a:bodyPr>
+          <a:lstStyle/>
+          <a:p>
+            <a:r>
+              <a:rPr lang="ja-JP" altLang="en-US" sz="4620" b="1">
+                <a:ln w="3175">
+                  <a:solidFill>
+                    <a:schemeClr val="tx1"/>
+                  </a:solidFill>
+                </a:ln>
+                <a:solidFill>
+                  <a:schemeClr val="bg1"/>
+                </a:solidFill>
+              </a:rPr>
+              <a:t>コンピテンシー発表会</a:t>
+            </a:r>
+          </a:p>
+        </p:txBody>
+      </p:sp>
+      <p:sp>
+        <p:nvSpPr>
+          <p:cNvPr id="3" name="テキスト ボックス 2">
+            <a:extLst>
+              <a:ext uri="{FF2B5EF4-FFF2-40B4-BE49-F238E27FC236}">
+                <a16:creationId xmlns:a16="http://schemas.microsoft.com/office/drawing/2014/main" id="{87AC7078-F6C8-C470-2AC4-45F4F281AF55}"/>
+              </a:ext>
+            </a:extLst>
+          </p:cNvPr>
+          <p:cNvSpPr txBox="1"/>
+          <p:nvPr/>
+        </p:nvSpPr>
+        <p:spPr>
+          <a:xfrm>
+            <a:off x="2469389" y="2488116"/>
+            <a:ext cx="3743332" cy="803297"/>
+          </a:xfrm>
+          <a:prstGeom prst="rect">
+            <a:avLst/>
+          </a:prstGeom>
+          <a:noFill/>
+        </p:spPr>
+        <p:txBody>
+          <a:bodyPr wrap="none" rtlCol="0">
+            <a:spAutoFit/>
+          </a:bodyPr>
+          <a:lstStyle/>
+          <a:p>
+            <a:r>
+              <a:rPr lang="ja-JP" altLang="en-US" sz="4620" b="1">
+                <a:ln w="3175">
+                  <a:solidFill>
+                    <a:schemeClr val="tx1"/>
+                  </a:solidFill>
+                </a:ln>
+                <a:solidFill>
+                  <a:schemeClr val="bg1"/>
+                </a:solidFill>
+              </a:rPr>
+              <a:t>近日募集開始</a:t>
+            </a:r>
+          </a:p>
+        </p:txBody>
+      </p:sp>
+    </p:spTree>
+    <p:extLst>
+      <p:ext uri="{BB962C8B-B14F-4D97-AF65-F5344CB8AC3E}">
+        <p14:creationId xmlns:p14="http://schemas.microsoft.com/office/powerpoint/2010/main" val="2086542722"/>
       </p:ext>
     </p:extLst>
   </p:cSld>
